--- a/Scrum.pptx
+++ b/Scrum.pptx
@@ -3255,6 +3255,13 @@
         </dgm:presLayoutVars>
       </dgm:prSet>
       <dgm:spPr/>
+      <dgm:t>
+        <a:bodyPr/>
+        <a:lstStyle/>
+        <a:p>
+          <a:endParaRPr lang="de-DE"/>
+        </a:p>
+      </dgm:t>
     </dgm:pt>
     <dgm:pt modelId="{83742594-F717-42FD-8ABF-38FEAF503426}" type="pres">
       <dgm:prSet presAssocID="{F459E706-BA99-4812-81BF-AE062F7C471F}" presName="node" presStyleLbl="node1" presStyleIdx="0" presStyleCnt="1">
@@ -3263,6 +3270,13 @@
         </dgm:presLayoutVars>
       </dgm:prSet>
       <dgm:spPr/>
+      <dgm:t>
+        <a:bodyPr/>
+        <a:lstStyle/>
+        <a:p>
+          <a:endParaRPr lang="de-DE"/>
+        </a:p>
+      </dgm:t>
     </dgm:pt>
   </dgm:ptLst>
   <dgm:cxnLst>
@@ -3475,6 +3489,13 @@
         </dgm:presLayoutVars>
       </dgm:prSet>
       <dgm:spPr/>
+      <dgm:t>
+        <a:bodyPr/>
+        <a:lstStyle/>
+        <a:p>
+          <a:endParaRPr lang="de-DE"/>
+        </a:p>
+      </dgm:t>
     </dgm:pt>
     <dgm:pt modelId="{C7E5B795-164F-440B-A652-FAD3BCD7EEE7}" type="pres">
       <dgm:prSet presAssocID="{982C1B26-1B58-4642-BA7D-54A8336C0CD9}" presName="hierRoot1" presStyleCnt="0">
@@ -3495,10 +3516,24 @@
         </dgm:presLayoutVars>
       </dgm:prSet>
       <dgm:spPr/>
+      <dgm:t>
+        <a:bodyPr/>
+        <a:lstStyle/>
+        <a:p>
+          <a:endParaRPr lang="de-DE"/>
+        </a:p>
+      </dgm:t>
     </dgm:pt>
     <dgm:pt modelId="{AED712C9-B373-4809-AD00-57320C79CEB8}" type="pres">
       <dgm:prSet presAssocID="{982C1B26-1B58-4642-BA7D-54A8336C0CD9}" presName="rootConnector1" presStyleLbl="node1" presStyleIdx="0" presStyleCnt="0"/>
       <dgm:spPr/>
+      <dgm:t>
+        <a:bodyPr/>
+        <a:lstStyle/>
+        <a:p>
+          <a:endParaRPr lang="de-DE"/>
+        </a:p>
+      </dgm:t>
     </dgm:pt>
     <dgm:pt modelId="{CA08231A-266B-43BE-A303-1F310E2E20E1}" type="pres">
       <dgm:prSet presAssocID="{982C1B26-1B58-4642-BA7D-54A8336C0CD9}" presName="hierChild2" presStyleCnt="0"/>
@@ -3507,6 +3542,13 @@
     <dgm:pt modelId="{CF724A06-EC83-4A7A-A402-98010C123257}" type="pres">
       <dgm:prSet presAssocID="{C01C4B1A-006C-441C-AC97-7D9B420F2A2E}" presName="Name37" presStyleLbl="parChTrans1D2" presStyleIdx="0" presStyleCnt="3"/>
       <dgm:spPr/>
+      <dgm:t>
+        <a:bodyPr/>
+        <a:lstStyle/>
+        <a:p>
+          <a:endParaRPr lang="de-DE"/>
+        </a:p>
+      </dgm:t>
     </dgm:pt>
     <dgm:pt modelId="{1F6DA436-851D-44BE-A3A9-9229A621B4F7}" type="pres">
       <dgm:prSet presAssocID="{6600CFE7-0357-47E7-AC4D-14FD89B734EB}" presName="hierRoot2" presStyleCnt="0">
@@ -3527,10 +3569,24 @@
         </dgm:presLayoutVars>
       </dgm:prSet>
       <dgm:spPr/>
+      <dgm:t>
+        <a:bodyPr/>
+        <a:lstStyle/>
+        <a:p>
+          <a:endParaRPr lang="de-DE"/>
+        </a:p>
+      </dgm:t>
     </dgm:pt>
     <dgm:pt modelId="{17010A95-A311-4A1B-8875-E50FD81C3519}" type="pres">
       <dgm:prSet presAssocID="{6600CFE7-0357-47E7-AC4D-14FD89B734EB}" presName="rootConnector" presStyleLbl="node2" presStyleIdx="0" presStyleCnt="3"/>
       <dgm:spPr/>
+      <dgm:t>
+        <a:bodyPr/>
+        <a:lstStyle/>
+        <a:p>
+          <a:endParaRPr lang="de-DE"/>
+        </a:p>
+      </dgm:t>
     </dgm:pt>
     <dgm:pt modelId="{D27F1C9F-ACCF-447B-860B-9B592DFFDD3F}" type="pres">
       <dgm:prSet presAssocID="{6600CFE7-0357-47E7-AC4D-14FD89B734EB}" presName="hierChild4" presStyleCnt="0"/>
@@ -3543,6 +3599,13 @@
     <dgm:pt modelId="{C5503C83-95D9-49B0-86A6-C3969CFB93E1}" type="pres">
       <dgm:prSet presAssocID="{2B6B05DD-D6A8-456B-9F21-C68B57275CEC}" presName="Name37" presStyleLbl="parChTrans1D2" presStyleIdx="1" presStyleCnt="3"/>
       <dgm:spPr/>
+      <dgm:t>
+        <a:bodyPr/>
+        <a:lstStyle/>
+        <a:p>
+          <a:endParaRPr lang="de-DE"/>
+        </a:p>
+      </dgm:t>
     </dgm:pt>
     <dgm:pt modelId="{3BD3C57B-9C44-4D71-85F7-324283A1D14D}" type="pres">
       <dgm:prSet presAssocID="{E5343328-F10F-47BA-9548-4EA6AAAF0FBF}" presName="hierRoot2" presStyleCnt="0">
@@ -3563,10 +3626,24 @@
         </dgm:presLayoutVars>
       </dgm:prSet>
       <dgm:spPr/>
+      <dgm:t>
+        <a:bodyPr/>
+        <a:lstStyle/>
+        <a:p>
+          <a:endParaRPr lang="de-DE"/>
+        </a:p>
+      </dgm:t>
     </dgm:pt>
     <dgm:pt modelId="{4E2D06B7-FDAD-40DE-8941-C14D6514CDB5}" type="pres">
       <dgm:prSet presAssocID="{E5343328-F10F-47BA-9548-4EA6AAAF0FBF}" presName="rootConnector" presStyleLbl="node2" presStyleIdx="1" presStyleCnt="3"/>
       <dgm:spPr/>
+      <dgm:t>
+        <a:bodyPr/>
+        <a:lstStyle/>
+        <a:p>
+          <a:endParaRPr lang="de-DE"/>
+        </a:p>
+      </dgm:t>
     </dgm:pt>
     <dgm:pt modelId="{5F583B81-A1D2-4144-8640-ECE9358F13E9}" type="pres">
       <dgm:prSet presAssocID="{E5343328-F10F-47BA-9548-4EA6AAAF0FBF}" presName="hierChild4" presStyleCnt="0"/>
@@ -3579,6 +3656,13 @@
     <dgm:pt modelId="{F108DAAE-CD22-4C36-9725-5D89B81BD2FC}" type="pres">
       <dgm:prSet presAssocID="{601A93A5-D452-44F4-9E7E-9F8738A9F70C}" presName="Name37" presStyleLbl="parChTrans1D2" presStyleIdx="2" presStyleCnt="3"/>
       <dgm:spPr/>
+      <dgm:t>
+        <a:bodyPr/>
+        <a:lstStyle/>
+        <a:p>
+          <a:endParaRPr lang="de-DE"/>
+        </a:p>
+      </dgm:t>
     </dgm:pt>
     <dgm:pt modelId="{2B73F90D-E1DF-4A41-B99B-0D5465C3D512}" type="pres">
       <dgm:prSet presAssocID="{53C39CDD-AD4D-41AD-AA3B-6CB884DCAF2A}" presName="hierRoot2" presStyleCnt="0">
@@ -3599,10 +3683,24 @@
         </dgm:presLayoutVars>
       </dgm:prSet>
       <dgm:spPr/>
+      <dgm:t>
+        <a:bodyPr/>
+        <a:lstStyle/>
+        <a:p>
+          <a:endParaRPr lang="de-DE"/>
+        </a:p>
+      </dgm:t>
     </dgm:pt>
     <dgm:pt modelId="{9584CFB4-68F6-46DF-AD87-D0161A9B6FA0}" type="pres">
       <dgm:prSet presAssocID="{53C39CDD-AD4D-41AD-AA3B-6CB884DCAF2A}" presName="rootConnector" presStyleLbl="node2" presStyleIdx="2" presStyleCnt="3"/>
       <dgm:spPr/>
+      <dgm:t>
+        <a:bodyPr/>
+        <a:lstStyle/>
+        <a:p>
+          <a:endParaRPr lang="de-DE"/>
+        </a:p>
+      </dgm:t>
     </dgm:pt>
     <dgm:pt modelId="{EBB13CA9-054C-41C0-BEF4-00505351A7C8}" type="pres">
       <dgm:prSet presAssocID="{53C39CDD-AD4D-41AD-AA3B-6CB884DCAF2A}" presName="hierChild4" presStyleCnt="0"/>
@@ -3866,6 +3964,13 @@
         </dgm:presLayoutVars>
       </dgm:prSet>
       <dgm:spPr/>
+      <dgm:t>
+        <a:bodyPr/>
+        <a:lstStyle/>
+        <a:p>
+          <a:endParaRPr lang="de-DE"/>
+        </a:p>
+      </dgm:t>
     </dgm:pt>
     <dgm:pt modelId="{C7E5B795-164F-440B-A652-FAD3BCD7EEE7}" type="pres">
       <dgm:prSet presAssocID="{982C1B26-1B58-4642-BA7D-54A8336C0CD9}" presName="hierRoot1" presStyleCnt="0">
@@ -3886,10 +3991,24 @@
         </dgm:presLayoutVars>
       </dgm:prSet>
       <dgm:spPr/>
+      <dgm:t>
+        <a:bodyPr/>
+        <a:lstStyle/>
+        <a:p>
+          <a:endParaRPr lang="de-DE"/>
+        </a:p>
+      </dgm:t>
     </dgm:pt>
     <dgm:pt modelId="{AED712C9-B373-4809-AD00-57320C79CEB8}" type="pres">
       <dgm:prSet presAssocID="{982C1B26-1B58-4642-BA7D-54A8336C0CD9}" presName="rootConnector1" presStyleLbl="node1" presStyleIdx="0" presStyleCnt="0"/>
       <dgm:spPr/>
+      <dgm:t>
+        <a:bodyPr/>
+        <a:lstStyle/>
+        <a:p>
+          <a:endParaRPr lang="de-DE"/>
+        </a:p>
+      </dgm:t>
     </dgm:pt>
     <dgm:pt modelId="{CA08231A-266B-43BE-A303-1F310E2E20E1}" type="pres">
       <dgm:prSet presAssocID="{982C1B26-1B58-4642-BA7D-54A8336C0CD9}" presName="hierChild2" presStyleCnt="0"/>
@@ -3898,6 +4017,13 @@
     <dgm:pt modelId="{CF724A06-EC83-4A7A-A402-98010C123257}" type="pres">
       <dgm:prSet presAssocID="{C01C4B1A-006C-441C-AC97-7D9B420F2A2E}" presName="Name37" presStyleLbl="parChTrans1D2" presStyleIdx="0" presStyleCnt="3"/>
       <dgm:spPr/>
+      <dgm:t>
+        <a:bodyPr/>
+        <a:lstStyle/>
+        <a:p>
+          <a:endParaRPr lang="de-DE"/>
+        </a:p>
+      </dgm:t>
     </dgm:pt>
     <dgm:pt modelId="{1F6DA436-851D-44BE-A3A9-9229A621B4F7}" type="pres">
       <dgm:prSet presAssocID="{6600CFE7-0357-47E7-AC4D-14FD89B734EB}" presName="hierRoot2" presStyleCnt="0">
@@ -3918,10 +4044,24 @@
         </dgm:presLayoutVars>
       </dgm:prSet>
       <dgm:spPr/>
+      <dgm:t>
+        <a:bodyPr/>
+        <a:lstStyle/>
+        <a:p>
+          <a:endParaRPr lang="de-DE"/>
+        </a:p>
+      </dgm:t>
     </dgm:pt>
     <dgm:pt modelId="{17010A95-A311-4A1B-8875-E50FD81C3519}" type="pres">
       <dgm:prSet presAssocID="{6600CFE7-0357-47E7-AC4D-14FD89B734EB}" presName="rootConnector" presStyleLbl="node2" presStyleIdx="0" presStyleCnt="3"/>
       <dgm:spPr/>
+      <dgm:t>
+        <a:bodyPr/>
+        <a:lstStyle/>
+        <a:p>
+          <a:endParaRPr lang="de-DE"/>
+        </a:p>
+      </dgm:t>
     </dgm:pt>
     <dgm:pt modelId="{D27F1C9F-ACCF-447B-860B-9B592DFFDD3F}" type="pres">
       <dgm:prSet presAssocID="{6600CFE7-0357-47E7-AC4D-14FD89B734EB}" presName="hierChild4" presStyleCnt="0"/>
@@ -3934,6 +4074,13 @@
     <dgm:pt modelId="{C5503C83-95D9-49B0-86A6-C3969CFB93E1}" type="pres">
       <dgm:prSet presAssocID="{2B6B05DD-D6A8-456B-9F21-C68B57275CEC}" presName="Name37" presStyleLbl="parChTrans1D2" presStyleIdx="1" presStyleCnt="3"/>
       <dgm:spPr/>
+      <dgm:t>
+        <a:bodyPr/>
+        <a:lstStyle/>
+        <a:p>
+          <a:endParaRPr lang="de-DE"/>
+        </a:p>
+      </dgm:t>
     </dgm:pt>
     <dgm:pt modelId="{3BD3C57B-9C44-4D71-85F7-324283A1D14D}" type="pres">
       <dgm:prSet presAssocID="{E5343328-F10F-47BA-9548-4EA6AAAF0FBF}" presName="hierRoot2" presStyleCnt="0">
@@ -3954,10 +4101,24 @@
         </dgm:presLayoutVars>
       </dgm:prSet>
       <dgm:spPr/>
+      <dgm:t>
+        <a:bodyPr/>
+        <a:lstStyle/>
+        <a:p>
+          <a:endParaRPr lang="de-DE"/>
+        </a:p>
+      </dgm:t>
     </dgm:pt>
     <dgm:pt modelId="{4E2D06B7-FDAD-40DE-8941-C14D6514CDB5}" type="pres">
       <dgm:prSet presAssocID="{E5343328-F10F-47BA-9548-4EA6AAAF0FBF}" presName="rootConnector" presStyleLbl="node2" presStyleIdx="1" presStyleCnt="3"/>
       <dgm:spPr/>
+      <dgm:t>
+        <a:bodyPr/>
+        <a:lstStyle/>
+        <a:p>
+          <a:endParaRPr lang="de-DE"/>
+        </a:p>
+      </dgm:t>
     </dgm:pt>
     <dgm:pt modelId="{5F583B81-A1D2-4144-8640-ECE9358F13E9}" type="pres">
       <dgm:prSet presAssocID="{E5343328-F10F-47BA-9548-4EA6AAAF0FBF}" presName="hierChild4" presStyleCnt="0"/>
@@ -3970,6 +4131,13 @@
     <dgm:pt modelId="{F108DAAE-CD22-4C36-9725-5D89B81BD2FC}" type="pres">
       <dgm:prSet presAssocID="{601A93A5-D452-44F4-9E7E-9F8738A9F70C}" presName="Name37" presStyleLbl="parChTrans1D2" presStyleIdx="2" presStyleCnt="3"/>
       <dgm:spPr/>
+      <dgm:t>
+        <a:bodyPr/>
+        <a:lstStyle/>
+        <a:p>
+          <a:endParaRPr lang="de-DE"/>
+        </a:p>
+      </dgm:t>
     </dgm:pt>
     <dgm:pt modelId="{2B73F90D-E1DF-4A41-B99B-0D5465C3D512}" type="pres">
       <dgm:prSet presAssocID="{53C39CDD-AD4D-41AD-AA3B-6CB884DCAF2A}" presName="hierRoot2" presStyleCnt="0">
@@ -3990,10 +4158,24 @@
         </dgm:presLayoutVars>
       </dgm:prSet>
       <dgm:spPr/>
+      <dgm:t>
+        <a:bodyPr/>
+        <a:lstStyle/>
+        <a:p>
+          <a:endParaRPr lang="de-DE"/>
+        </a:p>
+      </dgm:t>
     </dgm:pt>
     <dgm:pt modelId="{9584CFB4-68F6-46DF-AD87-D0161A9B6FA0}" type="pres">
       <dgm:prSet presAssocID="{53C39CDD-AD4D-41AD-AA3B-6CB884DCAF2A}" presName="rootConnector" presStyleLbl="node2" presStyleIdx="2" presStyleCnt="3"/>
       <dgm:spPr/>
+      <dgm:t>
+        <a:bodyPr/>
+        <a:lstStyle/>
+        <a:p>
+          <a:endParaRPr lang="de-DE"/>
+        </a:p>
+      </dgm:t>
     </dgm:pt>
     <dgm:pt modelId="{EBB13CA9-054C-41C0-BEF4-00505351A7C8}" type="pres">
       <dgm:prSet presAssocID="{53C39CDD-AD4D-41AD-AA3B-6CB884DCAF2A}" presName="hierChild4" presStyleCnt="0"/>
@@ -4504,6 +4686,13 @@
         </dgm:presLayoutVars>
       </dgm:prSet>
       <dgm:spPr/>
+      <dgm:t>
+        <a:bodyPr/>
+        <a:lstStyle/>
+        <a:p>
+          <a:endParaRPr lang="de-DE"/>
+        </a:p>
+      </dgm:t>
     </dgm:pt>
     <dgm:pt modelId="{39ACAB8D-7CB3-41D6-B8C2-3DC73EB1A31B}" type="pres">
       <dgm:prSet presAssocID="{1C048473-D09D-49AE-9BE0-6D470CE844BD}" presName="linNode" presStyleCnt="0"/>
@@ -4554,6 +4743,13 @@
         </dgm:presLayoutVars>
       </dgm:prSet>
       <dgm:spPr/>
+      <dgm:t>
+        <a:bodyPr/>
+        <a:lstStyle/>
+        <a:p>
+          <a:endParaRPr lang="de-DE"/>
+        </a:p>
+      </dgm:t>
     </dgm:pt>
     <dgm:pt modelId="{4EC4D185-08C1-409E-A54C-3A45456790AC}" type="pres">
       <dgm:prSet presAssocID="{BF5D7705-E03C-4E3F-B734-C6AA334BFFB0}" presName="childShp" presStyleLbl="bgAccFollowNode1" presStyleIdx="1" presStyleCnt="5">
@@ -4585,6 +4781,13 @@
         </dgm:presLayoutVars>
       </dgm:prSet>
       <dgm:spPr/>
+      <dgm:t>
+        <a:bodyPr/>
+        <a:lstStyle/>
+        <a:p>
+          <a:endParaRPr lang="de-DE"/>
+        </a:p>
+      </dgm:t>
     </dgm:pt>
     <dgm:pt modelId="{5B8A3B1E-69EF-4686-A5BB-447336AD33D4}" type="pres">
       <dgm:prSet presAssocID="{D1584ECB-B644-408D-AB3C-441B4055F0CF}" presName="childShp" presStyleLbl="bgAccFollowNode1" presStyleIdx="2" presStyleCnt="5">
@@ -4593,6 +4796,13 @@
         </dgm:presLayoutVars>
       </dgm:prSet>
       <dgm:spPr/>
+      <dgm:t>
+        <a:bodyPr/>
+        <a:lstStyle/>
+        <a:p>
+          <a:endParaRPr lang="de-DE"/>
+        </a:p>
+      </dgm:t>
     </dgm:pt>
     <dgm:pt modelId="{83406D7E-C6C9-47AD-9CD6-5E123F45D146}" type="pres">
       <dgm:prSet presAssocID="{26AB8540-BF32-45EE-BE56-42280BA6B7E3}" presName="spacing" presStyleCnt="0"/>
@@ -4609,6 +4819,13 @@
         </dgm:presLayoutVars>
       </dgm:prSet>
       <dgm:spPr/>
+      <dgm:t>
+        <a:bodyPr/>
+        <a:lstStyle/>
+        <a:p>
+          <a:endParaRPr lang="de-DE"/>
+        </a:p>
+      </dgm:t>
     </dgm:pt>
     <dgm:pt modelId="{305F6773-5B3F-4F6C-B4BE-63FFB4531825}" type="pres">
       <dgm:prSet presAssocID="{65CBA045-EF09-4326-AD25-6D9F663EA042}" presName="childShp" presStyleLbl="bgAccFollowNode1" presStyleIdx="3" presStyleCnt="5">
@@ -4617,6 +4834,13 @@
         </dgm:presLayoutVars>
       </dgm:prSet>
       <dgm:spPr/>
+      <dgm:t>
+        <a:bodyPr/>
+        <a:lstStyle/>
+        <a:p>
+          <a:endParaRPr lang="de-DE"/>
+        </a:p>
+      </dgm:t>
     </dgm:pt>
     <dgm:pt modelId="{1C7EA78E-1EE3-42BB-8775-21BF56BA01B3}" type="pres">
       <dgm:prSet presAssocID="{0DC9014F-29A0-4432-BE9B-F99E1CDAFF81}" presName="spacing" presStyleCnt="0"/>
@@ -4633,6 +4857,13 @@
         </dgm:presLayoutVars>
       </dgm:prSet>
       <dgm:spPr/>
+      <dgm:t>
+        <a:bodyPr/>
+        <a:lstStyle/>
+        <a:p>
+          <a:endParaRPr lang="de-DE"/>
+        </a:p>
+      </dgm:t>
     </dgm:pt>
     <dgm:pt modelId="{19AB6CE7-2049-4314-B60C-4A55BA4C2304}" type="pres">
       <dgm:prSet presAssocID="{333AFE40-4016-4C5F-8395-AC2050C96CA7}" presName="childShp" presStyleLbl="bgAccFollowNode1" presStyleIdx="4" presStyleCnt="5">
@@ -4641,6 +4872,13 @@
         </dgm:presLayoutVars>
       </dgm:prSet>
       <dgm:spPr/>
+      <dgm:t>
+        <a:bodyPr/>
+        <a:lstStyle/>
+        <a:p>
+          <a:endParaRPr lang="de-DE"/>
+        </a:p>
+      </dgm:t>
     </dgm:pt>
   </dgm:ptLst>
   <dgm:cxnLst>
@@ -4650,8 +4888,8 @@
     <dgm:cxn modelId="{3540BDD4-A92A-4103-8FC6-8FBEADF4CEEF}" type="presOf" srcId="{333AFE40-4016-4C5F-8395-AC2050C96CA7}" destId="{68E354AB-4658-4654-8E55-C13F150074B8}" srcOrd="0" destOrd="0" presId="urn:microsoft.com/office/officeart/2005/8/layout/vList6"/>
     <dgm:cxn modelId="{E51FBF91-653D-46A3-985A-5DB0DB912EB8}" srcId="{054ECC2A-D525-4E32-B907-5DD55212595D}" destId="{D1584ECB-B644-408D-AB3C-441B4055F0CF}" srcOrd="2" destOrd="0" parTransId="{AF8D9846-4BEE-4DE2-B5F8-1B4831975886}" sibTransId="{26AB8540-BF32-45EE-BE56-42280BA6B7E3}"/>
     <dgm:cxn modelId="{906A99A6-C299-4021-A5F8-121B93EF9D3D}" type="presOf" srcId="{DEAF33C6-093F-4131-92D8-C439059E410A}" destId="{5B8A3B1E-69EF-4686-A5BB-447336AD33D4}" srcOrd="0" destOrd="0" presId="urn:microsoft.com/office/officeart/2005/8/layout/vList6"/>
+    <dgm:cxn modelId="{8338003A-8A89-4869-BA26-BF497387C894}" type="presOf" srcId="{D1584ECB-B644-408D-AB3C-441B4055F0CF}" destId="{8279BC17-CB40-45D0-8E48-ED8F4342727F}" srcOrd="0" destOrd="0" presId="urn:microsoft.com/office/officeart/2005/8/layout/vList6"/>
     <dgm:cxn modelId="{8AF5CC50-BF47-49BB-88F3-E0D5CAE290EF}" srcId="{BF5D7705-E03C-4E3F-B734-C6AA334BFFB0}" destId="{5FF7FC4D-5EE4-4875-86D9-82125152A243}" srcOrd="0" destOrd="0" parTransId="{EAB1B8BF-48D3-4A09-8A51-3254B43A0DB4}" sibTransId="{DC76F339-FC77-4426-9AB4-6E85D5485F54}"/>
-    <dgm:cxn modelId="{8338003A-8A89-4869-BA26-BF497387C894}" type="presOf" srcId="{D1584ECB-B644-408D-AB3C-441B4055F0CF}" destId="{8279BC17-CB40-45D0-8E48-ED8F4342727F}" srcOrd="0" destOrd="0" presId="urn:microsoft.com/office/officeart/2005/8/layout/vList6"/>
     <dgm:cxn modelId="{943B97EC-722B-44FD-9BA9-41E3340054EB}" type="presOf" srcId="{5FF7FC4D-5EE4-4875-86D9-82125152A243}" destId="{4EC4D185-08C1-409E-A54C-3A45456790AC}" srcOrd="0" destOrd="0" presId="urn:microsoft.com/office/officeart/2005/8/layout/vList6"/>
     <dgm:cxn modelId="{78F78FAB-77B3-46C7-8D0F-AB21202A5E49}" srcId="{D1584ECB-B644-408D-AB3C-441B4055F0CF}" destId="{DEAF33C6-093F-4131-92D8-C439059E410A}" srcOrd="0" destOrd="0" parTransId="{928A6D92-6944-404A-AEB7-06F3ABC4BC4D}" sibTransId="{EE31CE55-CEFD-4B68-BCE2-A52DAA08AC12}"/>
     <dgm:cxn modelId="{B2593294-5560-4D95-9609-9736E80C5498}" type="presOf" srcId="{46AEFF6B-EE4B-4416-99C5-F3AD77314E2A}" destId="{305F6773-5B3F-4F6C-B4BE-63FFB4531825}" srcOrd="0" destOrd="0" presId="urn:microsoft.com/office/officeart/2005/8/layout/vList6"/>
@@ -5818,869 +6056,6 @@
       <dsp:cNvGrpSpPr/>
     </dsp:nvGrpSpPr>
     <dsp:grpSpPr/>
-    <dsp:sp modelId="{BF3AB3F3-2DD7-457D-A387-6C1DC8930EB4}">
-      <dsp:nvSpPr>
-        <dsp:cNvPr id="0" name=""/>
-        <dsp:cNvSpPr/>
-      </dsp:nvSpPr>
-      <dsp:spPr>
-        <a:xfrm>
-          <a:off x="2909123" y="2362"/>
-          <a:ext cx="4363684" cy="1279267"/>
-        </a:xfrm>
-        <a:prstGeom prst="rightArrow">
-          <a:avLst>
-            <a:gd name="adj1" fmla="val 75000"/>
-            <a:gd name="adj2" fmla="val 50000"/>
-          </a:avLst>
-        </a:prstGeom>
-        <a:solidFill>
-          <a:schemeClr val="accent3">
-            <a:tint val="40000"/>
-            <a:alpha val="90000"/>
-            <a:hueOff val="0"/>
-            <a:satOff val="0"/>
-            <a:lumOff val="0"/>
-            <a:alphaOff val="0"/>
-          </a:schemeClr>
-        </a:solidFill>
-        <a:ln w="9525" cap="flat" cmpd="sng" algn="ctr">
-          <a:solidFill>
-            <a:schemeClr val="accent3">
-              <a:tint val="40000"/>
-              <a:alpha val="90000"/>
-              <a:hueOff val="0"/>
-              <a:satOff val="0"/>
-              <a:lumOff val="0"/>
-              <a:alphaOff val="0"/>
-            </a:schemeClr>
-          </a:solidFill>
-          <a:prstDash val="solid"/>
-        </a:ln>
-        <a:effectLst/>
-        <a:sp3d z="-227350" prstMaterial="matte"/>
-      </dsp:spPr>
-      <dsp:style>
-        <a:lnRef idx="1">
-          <a:scrgbClr r="0" g="0" b="0"/>
-        </a:lnRef>
-        <a:fillRef idx="1">
-          <a:scrgbClr r="0" g="0" b="0"/>
-        </a:fillRef>
-        <a:effectRef idx="0">
-          <a:scrgbClr r="0" g="0" b="0"/>
-        </a:effectRef>
-        <a:fontRef idx="minor"/>
-      </dsp:style>
-      <dsp:txBody>
-        <a:bodyPr spcFirstLastPara="0" vert="horz" wrap="square" lIns="16510" tIns="16510" rIns="16510" bIns="16510" numCol="1" spcCol="1270" anchor="t" anchorCtr="0">
-          <a:noAutofit/>
-        </a:bodyPr>
-        <a:lstStyle/>
-        <a:p>
-          <a:pPr marL="228600" lvl="1" indent="-228600" algn="l" defTabSz="1155700">
-            <a:lnSpc>
-              <a:spcPct val="90000"/>
-            </a:lnSpc>
-            <a:spcBef>
-              <a:spcPct val="0"/>
-            </a:spcBef>
-            <a:spcAft>
-              <a:spcPct val="15000"/>
-            </a:spcAft>
-            <a:buChar char="••"/>
-          </a:pPr>
-          <a:r>
-            <a:rPr lang="de-DE" sz="2600" kern="1200" dirty="0" err="1" smtClean="0"/>
-            <a:t>Product</a:t>
-          </a:r>
-          <a:r>
-            <a:rPr lang="de-DE" sz="2600" kern="1200" dirty="0" smtClean="0"/>
-            <a:t> </a:t>
-          </a:r>
-          <a:r>
-            <a:rPr lang="de-DE" sz="2600" kern="1200" dirty="0" err="1" smtClean="0"/>
-            <a:t>Owner</a:t>
-          </a:r>
-          <a:r>
-            <a:rPr lang="de-DE" sz="2600" kern="1200" dirty="0" smtClean="0"/>
-            <a:t> + </a:t>
-          </a:r>
-          <a:r>
-            <a:rPr lang="de-DE" sz="2600" kern="1200" dirty="0" err="1" smtClean="0"/>
-            <a:t>Scrum</a:t>
-          </a:r>
-          <a:r>
-            <a:rPr lang="de-DE" sz="2600" kern="1200" dirty="0" smtClean="0"/>
-            <a:t> Master</a:t>
-          </a:r>
-          <a:endParaRPr lang="de-DE" sz="2600" kern="1200" dirty="0"/>
-        </a:p>
-      </dsp:txBody>
-      <dsp:txXfrm>
-        <a:off x="2909123" y="2362"/>
-        <a:ext cx="4363684" cy="1279267"/>
-      </dsp:txXfrm>
-    </dsp:sp>
-    <dsp:sp modelId="{E55CC113-2BD8-4CAA-879A-F0F07588856C}">
-      <dsp:nvSpPr>
-        <dsp:cNvPr id="0" name=""/>
-        <dsp:cNvSpPr/>
-      </dsp:nvSpPr>
-      <dsp:spPr>
-        <a:xfrm>
-          <a:off x="0" y="2362"/>
-          <a:ext cx="2909123" cy="1279267"/>
-        </a:xfrm>
-        <a:prstGeom prst="roundRect">
-          <a:avLst/>
-        </a:prstGeom>
-        <a:solidFill>
-          <a:schemeClr val="accent3">
-            <a:hueOff val="0"/>
-            <a:satOff val="0"/>
-            <a:lumOff val="0"/>
-            <a:alphaOff val="0"/>
-          </a:schemeClr>
-        </a:solidFill>
-        <a:ln>
-          <a:noFill/>
-        </a:ln>
-        <a:effectLst>
-          <a:outerShdw blurRad="40000" dist="23000" dir="5400000" rotWithShape="0">
-            <a:srgbClr val="000000">
-              <a:alpha val="35000"/>
-            </a:srgbClr>
-          </a:outerShdw>
-        </a:effectLst>
-        <a:sp3d extrusionH="152250" prstMaterial="matte">
-          <a:bevelT w="165100" prst="coolSlant"/>
-        </a:sp3d>
-      </dsp:spPr>
-      <dsp:style>
-        <a:lnRef idx="0">
-          <a:scrgbClr r="0" g="0" b="0"/>
-        </a:lnRef>
-        <a:fillRef idx="1">
-          <a:scrgbClr r="0" g="0" b="0"/>
-        </a:fillRef>
-        <a:effectRef idx="2">
-          <a:scrgbClr r="0" g="0" b="0"/>
-        </a:effectRef>
-        <a:fontRef idx="minor">
-          <a:schemeClr val="lt1"/>
-        </a:fontRef>
-      </dsp:style>
-      <dsp:txBody>
-        <a:bodyPr spcFirstLastPara="0" vert="horz" wrap="square" lIns="95250" tIns="47625" rIns="95250" bIns="47625" numCol="1" spcCol="1270" anchor="ctr" anchorCtr="0">
-          <a:noAutofit/>
-          <a:sp3d extrusionH="28000" prstMaterial="matte"/>
-        </a:bodyPr>
-        <a:lstStyle/>
-        <a:p>
-          <a:pPr lvl="0" algn="ctr" defTabSz="1111250">
-            <a:lnSpc>
-              <a:spcPct val="90000"/>
-            </a:lnSpc>
-            <a:spcBef>
-              <a:spcPct val="0"/>
-            </a:spcBef>
-            <a:spcAft>
-              <a:spcPct val="35000"/>
-            </a:spcAft>
-          </a:pPr>
-          <a:r>
-            <a:rPr lang="de-DE" sz="2500" kern="1200" dirty="0" err="1" smtClean="0"/>
-            <a:t>Backlog</a:t>
-          </a:r>
-          <a:r>
-            <a:rPr lang="de-DE" sz="2500" kern="1200" dirty="0" smtClean="0"/>
-            <a:t> vorbereiten</a:t>
-          </a:r>
-          <a:endParaRPr lang="de-DE" sz="2500" kern="1200" dirty="0"/>
-        </a:p>
-      </dsp:txBody>
-      <dsp:txXfrm>
-        <a:off x="0" y="2362"/>
-        <a:ext cx="2909123" cy="1279267"/>
-      </dsp:txXfrm>
-    </dsp:sp>
-    <dsp:sp modelId="{4EC4D185-08C1-409E-A54C-3A45456790AC}">
-      <dsp:nvSpPr>
-        <dsp:cNvPr id="0" name=""/>
-        <dsp:cNvSpPr/>
-      </dsp:nvSpPr>
-      <dsp:spPr>
-        <a:xfrm>
-          <a:off x="2909123" y="1409556"/>
-          <a:ext cx="4363684" cy="1279267"/>
-        </a:xfrm>
-        <a:prstGeom prst="rightArrow">
-          <a:avLst>
-            <a:gd name="adj1" fmla="val 75000"/>
-            <a:gd name="adj2" fmla="val 50000"/>
-          </a:avLst>
-        </a:prstGeom>
-        <a:solidFill>
-          <a:schemeClr val="accent3">
-            <a:tint val="40000"/>
-            <a:alpha val="90000"/>
-            <a:hueOff val="3192784"/>
-            <a:satOff val="-13274"/>
-            <a:lumOff val="-1121"/>
-            <a:alphaOff val="0"/>
-          </a:schemeClr>
-        </a:solidFill>
-        <a:ln w="9525" cap="flat" cmpd="sng" algn="ctr">
-          <a:solidFill>
-            <a:schemeClr val="accent3">
-              <a:tint val="40000"/>
-              <a:alpha val="90000"/>
-              <a:hueOff val="3192784"/>
-              <a:satOff val="-13274"/>
-              <a:lumOff val="-1121"/>
-              <a:alphaOff val="0"/>
-            </a:schemeClr>
-          </a:solidFill>
-          <a:prstDash val="solid"/>
-        </a:ln>
-        <a:effectLst/>
-        <a:sp3d z="-227350" prstMaterial="matte"/>
-      </dsp:spPr>
-      <dsp:style>
-        <a:lnRef idx="1">
-          <a:scrgbClr r="0" g="0" b="0"/>
-        </a:lnRef>
-        <a:fillRef idx="1">
-          <a:scrgbClr r="0" g="0" b="0"/>
-        </a:fillRef>
-        <a:effectRef idx="0">
-          <a:scrgbClr r="0" g="0" b="0"/>
-        </a:effectRef>
-        <a:fontRef idx="minor"/>
-      </dsp:style>
-      <dsp:txBody>
-        <a:bodyPr spcFirstLastPara="0" vert="horz" wrap="square" lIns="16510" tIns="16510" rIns="16510" bIns="16510" numCol="1" spcCol="1270" anchor="t" anchorCtr="0">
-          <a:noAutofit/>
-        </a:bodyPr>
-        <a:lstStyle/>
-        <a:p>
-          <a:pPr marL="228600" lvl="1" indent="-228600" algn="l" defTabSz="1155700">
-            <a:lnSpc>
-              <a:spcPct val="90000"/>
-            </a:lnSpc>
-            <a:spcBef>
-              <a:spcPct val="0"/>
-            </a:spcBef>
-            <a:spcAft>
-              <a:spcPct val="15000"/>
-            </a:spcAft>
-            <a:buChar char="••"/>
-          </a:pPr>
-          <a:r>
-            <a:rPr lang="de-DE" sz="2600" kern="1200" dirty="0" smtClean="0"/>
-            <a:t>Alle</a:t>
-          </a:r>
-          <a:endParaRPr lang="de-DE" sz="2600" kern="1200" dirty="0"/>
-        </a:p>
-      </dsp:txBody>
-      <dsp:txXfrm>
-        <a:off x="2909123" y="1409556"/>
-        <a:ext cx="4363684" cy="1279267"/>
-      </dsp:txXfrm>
-    </dsp:sp>
-    <dsp:sp modelId="{DF34BE5B-C41C-48EC-B1DD-EF8E08C4D504}">
-      <dsp:nvSpPr>
-        <dsp:cNvPr id="0" name=""/>
-        <dsp:cNvSpPr/>
-      </dsp:nvSpPr>
-      <dsp:spPr>
-        <a:xfrm>
-          <a:off x="0" y="1409556"/>
-          <a:ext cx="2909123" cy="1279267"/>
-        </a:xfrm>
-        <a:prstGeom prst="roundRect">
-          <a:avLst/>
-        </a:prstGeom>
-        <a:solidFill>
-          <a:schemeClr val="accent3">
-            <a:hueOff val="2906152"/>
-            <a:satOff val="-9286"/>
-            <a:lumOff val="-2353"/>
-            <a:alphaOff val="0"/>
-          </a:schemeClr>
-        </a:solidFill>
-        <a:ln>
-          <a:noFill/>
-        </a:ln>
-        <a:effectLst>
-          <a:outerShdw blurRad="40000" dist="23000" dir="5400000" rotWithShape="0">
-            <a:srgbClr val="000000">
-              <a:alpha val="35000"/>
-            </a:srgbClr>
-          </a:outerShdw>
-        </a:effectLst>
-        <a:sp3d extrusionH="152250" prstMaterial="matte">
-          <a:bevelT w="165100" prst="coolSlant"/>
-        </a:sp3d>
-      </dsp:spPr>
-      <dsp:style>
-        <a:lnRef idx="0">
-          <a:scrgbClr r="0" g="0" b="0"/>
-        </a:lnRef>
-        <a:fillRef idx="1">
-          <a:scrgbClr r="0" g="0" b="0"/>
-        </a:fillRef>
-        <a:effectRef idx="2">
-          <a:scrgbClr r="0" g="0" b="0"/>
-        </a:effectRef>
-        <a:fontRef idx="minor">
-          <a:schemeClr val="lt1"/>
-        </a:fontRef>
-      </dsp:style>
-      <dsp:txBody>
-        <a:bodyPr spcFirstLastPara="0" vert="horz" wrap="square" lIns="95250" tIns="47625" rIns="95250" bIns="47625" numCol="1" spcCol="1270" anchor="ctr" anchorCtr="0">
-          <a:noAutofit/>
-          <a:sp3d extrusionH="28000" prstMaterial="matte"/>
-        </a:bodyPr>
-        <a:lstStyle/>
-        <a:p>
-          <a:pPr lvl="0" algn="ctr" defTabSz="1111250">
-            <a:lnSpc>
-              <a:spcPct val="90000"/>
-            </a:lnSpc>
-            <a:spcBef>
-              <a:spcPct val="0"/>
-            </a:spcBef>
-            <a:spcAft>
-              <a:spcPct val="35000"/>
-            </a:spcAft>
-          </a:pPr>
-          <a:r>
-            <a:rPr lang="de-DE" sz="2500" kern="1200" dirty="0" smtClean="0"/>
-            <a:t>Sprint Review</a:t>
-          </a:r>
-          <a:endParaRPr lang="de-DE" sz="2500" kern="1200" dirty="0"/>
-        </a:p>
-      </dsp:txBody>
-      <dsp:txXfrm>
-        <a:off x="0" y="1409556"/>
-        <a:ext cx="2909123" cy="1279267"/>
-      </dsp:txXfrm>
-    </dsp:sp>
-    <dsp:sp modelId="{5B8A3B1E-69EF-4686-A5BB-447336AD33D4}">
-      <dsp:nvSpPr>
-        <dsp:cNvPr id="0" name=""/>
-        <dsp:cNvSpPr/>
-      </dsp:nvSpPr>
-      <dsp:spPr>
-        <a:xfrm>
-          <a:off x="2909123" y="2816750"/>
-          <a:ext cx="4363684" cy="1279267"/>
-        </a:xfrm>
-        <a:prstGeom prst="rightArrow">
-          <a:avLst>
-            <a:gd name="adj1" fmla="val 75000"/>
-            <a:gd name="adj2" fmla="val 50000"/>
-          </a:avLst>
-        </a:prstGeom>
-        <a:solidFill>
-          <a:schemeClr val="accent3">
-            <a:tint val="40000"/>
-            <a:alpha val="90000"/>
-            <a:hueOff val="6385568"/>
-            <a:satOff val="-26549"/>
-            <a:lumOff val="-2243"/>
-            <a:alphaOff val="0"/>
-          </a:schemeClr>
-        </a:solidFill>
-        <a:ln w="9525" cap="flat" cmpd="sng" algn="ctr">
-          <a:solidFill>
-            <a:schemeClr val="accent3">
-              <a:tint val="40000"/>
-              <a:alpha val="90000"/>
-              <a:hueOff val="6385568"/>
-              <a:satOff val="-26549"/>
-              <a:lumOff val="-2243"/>
-              <a:alphaOff val="0"/>
-            </a:schemeClr>
-          </a:solidFill>
-          <a:prstDash val="solid"/>
-        </a:ln>
-        <a:effectLst/>
-        <a:sp3d z="-227350" prstMaterial="matte"/>
-      </dsp:spPr>
-      <dsp:style>
-        <a:lnRef idx="1">
-          <a:scrgbClr r="0" g="0" b="0"/>
-        </a:lnRef>
-        <a:fillRef idx="1">
-          <a:scrgbClr r="0" g="0" b="0"/>
-        </a:fillRef>
-        <a:effectRef idx="0">
-          <a:scrgbClr r="0" g="0" b="0"/>
-        </a:effectRef>
-        <a:fontRef idx="minor"/>
-      </dsp:style>
-      <dsp:txBody>
-        <a:bodyPr spcFirstLastPara="0" vert="horz" wrap="square" lIns="16510" tIns="16510" rIns="16510" bIns="16510" numCol="1" spcCol="1270" anchor="t" anchorCtr="0">
-          <a:noAutofit/>
-        </a:bodyPr>
-        <a:lstStyle/>
-        <a:p>
-          <a:pPr marL="228600" lvl="1" indent="-228600" algn="l" defTabSz="1155700">
-            <a:lnSpc>
-              <a:spcPct val="90000"/>
-            </a:lnSpc>
-            <a:spcBef>
-              <a:spcPct val="0"/>
-            </a:spcBef>
-            <a:spcAft>
-              <a:spcPct val="15000"/>
-            </a:spcAft>
-            <a:buChar char="••"/>
-          </a:pPr>
-          <a:r>
-            <a:rPr lang="de-DE" sz="2600" kern="1200" dirty="0" smtClean="0"/>
-            <a:t>Alle</a:t>
-          </a:r>
-          <a:endParaRPr lang="de-DE" sz="2600" kern="1200" dirty="0"/>
-        </a:p>
-      </dsp:txBody>
-      <dsp:txXfrm>
-        <a:off x="2909123" y="2816750"/>
-        <a:ext cx="4363684" cy="1279267"/>
-      </dsp:txXfrm>
-    </dsp:sp>
-    <dsp:sp modelId="{8279BC17-CB40-45D0-8E48-ED8F4342727F}">
-      <dsp:nvSpPr>
-        <dsp:cNvPr id="0" name=""/>
-        <dsp:cNvSpPr/>
-      </dsp:nvSpPr>
-      <dsp:spPr>
-        <a:xfrm>
-          <a:off x="0" y="2816750"/>
-          <a:ext cx="2909123" cy="1279267"/>
-        </a:xfrm>
-        <a:prstGeom prst="roundRect">
-          <a:avLst/>
-        </a:prstGeom>
-        <a:solidFill>
-          <a:schemeClr val="accent3">
-            <a:hueOff val="5812304"/>
-            <a:satOff val="-18573"/>
-            <a:lumOff val="-4706"/>
-            <a:alphaOff val="0"/>
-          </a:schemeClr>
-        </a:solidFill>
-        <a:ln>
-          <a:noFill/>
-        </a:ln>
-        <a:effectLst>
-          <a:outerShdw blurRad="40000" dist="23000" dir="5400000" rotWithShape="0">
-            <a:srgbClr val="000000">
-              <a:alpha val="35000"/>
-            </a:srgbClr>
-          </a:outerShdw>
-        </a:effectLst>
-        <a:sp3d extrusionH="152250" prstMaterial="matte">
-          <a:bevelT w="165100" prst="coolSlant"/>
-        </a:sp3d>
-      </dsp:spPr>
-      <dsp:style>
-        <a:lnRef idx="0">
-          <a:scrgbClr r="0" g="0" b="0"/>
-        </a:lnRef>
-        <a:fillRef idx="1">
-          <a:scrgbClr r="0" g="0" b="0"/>
-        </a:fillRef>
-        <a:effectRef idx="2">
-          <a:scrgbClr r="0" g="0" b="0"/>
-        </a:effectRef>
-        <a:fontRef idx="minor">
-          <a:schemeClr val="lt1"/>
-        </a:fontRef>
-      </dsp:style>
-      <dsp:txBody>
-        <a:bodyPr spcFirstLastPara="0" vert="horz" wrap="square" lIns="95250" tIns="47625" rIns="95250" bIns="47625" numCol="1" spcCol="1270" anchor="ctr" anchorCtr="0">
-          <a:noAutofit/>
-          <a:sp3d extrusionH="28000" prstMaterial="matte"/>
-        </a:bodyPr>
-        <a:lstStyle/>
-        <a:p>
-          <a:pPr lvl="0" algn="ctr" defTabSz="1111250">
-            <a:lnSpc>
-              <a:spcPct val="90000"/>
-            </a:lnSpc>
-            <a:spcBef>
-              <a:spcPct val="0"/>
-            </a:spcBef>
-            <a:spcAft>
-              <a:spcPct val="35000"/>
-            </a:spcAft>
-          </a:pPr>
-          <a:r>
-            <a:rPr lang="de-DE" sz="2500" kern="1200" dirty="0" smtClean="0"/>
-            <a:t>Sprint </a:t>
-          </a:r>
-          <a:r>
-            <a:rPr lang="de-DE" sz="2500" kern="1200" dirty="0" err="1" smtClean="0"/>
-            <a:t>Retrospective</a:t>
-          </a:r>
-          <a:r>
-            <a:rPr lang="de-DE" sz="2500" kern="1200" dirty="0" smtClean="0"/>
-            <a:t> Meeting</a:t>
-          </a:r>
-          <a:endParaRPr lang="de-DE" sz="2500" kern="1200" dirty="0"/>
-        </a:p>
-      </dsp:txBody>
-      <dsp:txXfrm>
-        <a:off x="0" y="2816750"/>
-        <a:ext cx="2909123" cy="1279267"/>
-      </dsp:txXfrm>
-    </dsp:sp>
-    <dsp:sp modelId="{305F6773-5B3F-4F6C-B4BE-63FFB4531825}">
-      <dsp:nvSpPr>
-        <dsp:cNvPr id="0" name=""/>
-        <dsp:cNvSpPr/>
-      </dsp:nvSpPr>
-      <dsp:spPr>
-        <a:xfrm>
-          <a:off x="2909123" y="4223944"/>
-          <a:ext cx="4363684" cy="1279267"/>
-        </a:xfrm>
-        <a:prstGeom prst="rightArrow">
-          <a:avLst>
-            <a:gd name="adj1" fmla="val 75000"/>
-            <a:gd name="adj2" fmla="val 50000"/>
-          </a:avLst>
-        </a:prstGeom>
-        <a:solidFill>
-          <a:schemeClr val="accent3">
-            <a:tint val="40000"/>
-            <a:alpha val="90000"/>
-            <a:hueOff val="9578351"/>
-            <a:satOff val="-39823"/>
-            <a:lumOff val="-3364"/>
-            <a:alphaOff val="0"/>
-          </a:schemeClr>
-        </a:solidFill>
-        <a:ln w="9525" cap="flat" cmpd="sng" algn="ctr">
-          <a:solidFill>
-            <a:schemeClr val="accent3">
-              <a:tint val="40000"/>
-              <a:alpha val="90000"/>
-              <a:hueOff val="9578351"/>
-              <a:satOff val="-39823"/>
-              <a:lumOff val="-3364"/>
-              <a:alphaOff val="0"/>
-            </a:schemeClr>
-          </a:solidFill>
-          <a:prstDash val="solid"/>
-        </a:ln>
-        <a:effectLst/>
-        <a:sp3d z="-227350" prstMaterial="matte"/>
-      </dsp:spPr>
-      <dsp:style>
-        <a:lnRef idx="1">
-          <a:scrgbClr r="0" g="0" b="0"/>
-        </a:lnRef>
-        <a:fillRef idx="1">
-          <a:scrgbClr r="0" g="0" b="0"/>
-        </a:fillRef>
-        <a:effectRef idx="0">
-          <a:scrgbClr r="0" g="0" b="0"/>
-        </a:effectRef>
-        <a:fontRef idx="minor"/>
-      </dsp:style>
-      <dsp:txBody>
-        <a:bodyPr spcFirstLastPara="0" vert="horz" wrap="square" lIns="16510" tIns="16510" rIns="16510" bIns="16510" numCol="1" spcCol="1270" anchor="t" anchorCtr="0">
-          <a:noAutofit/>
-        </a:bodyPr>
-        <a:lstStyle/>
-        <a:p>
-          <a:pPr marL="228600" lvl="1" indent="-228600" algn="l" defTabSz="1155700">
-            <a:lnSpc>
-              <a:spcPct val="90000"/>
-            </a:lnSpc>
-            <a:spcBef>
-              <a:spcPct val="0"/>
-            </a:spcBef>
-            <a:spcAft>
-              <a:spcPct val="15000"/>
-            </a:spcAft>
-            <a:buChar char="••"/>
-          </a:pPr>
-          <a:r>
-            <a:rPr lang="de-DE" sz="2600" kern="1200" dirty="0" smtClean="0"/>
-            <a:t>Alle</a:t>
-          </a:r>
-          <a:endParaRPr lang="de-DE" sz="2600" kern="1200" dirty="0"/>
-        </a:p>
-      </dsp:txBody>
-      <dsp:txXfrm>
-        <a:off x="2909123" y="4223944"/>
-        <a:ext cx="4363684" cy="1279267"/>
-      </dsp:txXfrm>
-    </dsp:sp>
-    <dsp:sp modelId="{FC2CD783-F90D-4BC9-BFFC-4F9E7586B54F}">
-      <dsp:nvSpPr>
-        <dsp:cNvPr id="0" name=""/>
-        <dsp:cNvSpPr/>
-      </dsp:nvSpPr>
-      <dsp:spPr>
-        <a:xfrm>
-          <a:off x="0" y="4223944"/>
-          <a:ext cx="2909123" cy="1279267"/>
-        </a:xfrm>
-        <a:prstGeom prst="roundRect">
-          <a:avLst/>
-        </a:prstGeom>
-        <a:solidFill>
-          <a:schemeClr val="accent3">
-            <a:hueOff val="8718455"/>
-            <a:satOff val="-27859"/>
-            <a:lumOff val="-7059"/>
-            <a:alphaOff val="0"/>
-          </a:schemeClr>
-        </a:solidFill>
-        <a:ln>
-          <a:noFill/>
-        </a:ln>
-        <a:effectLst>
-          <a:outerShdw blurRad="40000" dist="23000" dir="5400000" rotWithShape="0">
-            <a:srgbClr val="000000">
-              <a:alpha val="35000"/>
-            </a:srgbClr>
-          </a:outerShdw>
-        </a:effectLst>
-        <a:sp3d extrusionH="152250" prstMaterial="matte">
-          <a:bevelT w="165100" prst="coolSlant"/>
-        </a:sp3d>
-      </dsp:spPr>
-      <dsp:style>
-        <a:lnRef idx="0">
-          <a:scrgbClr r="0" g="0" b="0"/>
-        </a:lnRef>
-        <a:fillRef idx="1">
-          <a:scrgbClr r="0" g="0" b="0"/>
-        </a:fillRef>
-        <a:effectRef idx="2">
-          <a:scrgbClr r="0" g="0" b="0"/>
-        </a:effectRef>
-        <a:fontRef idx="minor">
-          <a:schemeClr val="lt1"/>
-        </a:fontRef>
-      </dsp:style>
-      <dsp:txBody>
-        <a:bodyPr spcFirstLastPara="0" vert="horz" wrap="square" lIns="95250" tIns="47625" rIns="95250" bIns="47625" numCol="1" spcCol="1270" anchor="ctr" anchorCtr="0">
-          <a:noAutofit/>
-          <a:sp3d extrusionH="28000" prstMaterial="matte"/>
-        </a:bodyPr>
-        <a:lstStyle/>
-        <a:p>
-          <a:pPr lvl="0" algn="ctr" defTabSz="1111250">
-            <a:lnSpc>
-              <a:spcPct val="90000"/>
-            </a:lnSpc>
-            <a:spcBef>
-              <a:spcPct val="0"/>
-            </a:spcBef>
-            <a:spcAft>
-              <a:spcPct val="35000"/>
-            </a:spcAft>
-          </a:pPr>
-          <a:r>
-            <a:rPr lang="de-DE" sz="2500" kern="1200" dirty="0" smtClean="0"/>
-            <a:t>Sprint </a:t>
-          </a:r>
-          <a:r>
-            <a:rPr lang="de-DE" sz="2500" kern="1200" dirty="0" err="1" smtClean="0"/>
-            <a:t>Planning</a:t>
-          </a:r>
-          <a:r>
-            <a:rPr lang="de-DE" sz="2500" kern="1200" dirty="0" smtClean="0"/>
-            <a:t> Meeting 1</a:t>
-          </a:r>
-          <a:endParaRPr lang="de-DE" sz="2500" kern="1200" dirty="0"/>
-        </a:p>
-      </dsp:txBody>
-      <dsp:txXfrm>
-        <a:off x="0" y="4223944"/>
-        <a:ext cx="2909123" cy="1279267"/>
-      </dsp:txXfrm>
-    </dsp:sp>
-    <dsp:sp modelId="{19AB6CE7-2049-4314-B60C-4A55BA4C2304}">
-      <dsp:nvSpPr>
-        <dsp:cNvPr id="0" name=""/>
-        <dsp:cNvSpPr/>
-      </dsp:nvSpPr>
-      <dsp:spPr>
-        <a:xfrm>
-          <a:off x="2909123" y="5631138"/>
-          <a:ext cx="4363684" cy="1279267"/>
-        </a:xfrm>
-        <a:prstGeom prst="rightArrow">
-          <a:avLst>
-            <a:gd name="adj1" fmla="val 75000"/>
-            <a:gd name="adj2" fmla="val 50000"/>
-          </a:avLst>
-        </a:prstGeom>
-        <a:solidFill>
-          <a:schemeClr val="accent3">
-            <a:tint val="40000"/>
-            <a:alpha val="90000"/>
-            <a:hueOff val="12771136"/>
-            <a:satOff val="-53098"/>
-            <a:lumOff val="-4485"/>
-            <a:alphaOff val="0"/>
-          </a:schemeClr>
-        </a:solidFill>
-        <a:ln w="9525" cap="flat" cmpd="sng" algn="ctr">
-          <a:solidFill>
-            <a:schemeClr val="accent3">
-              <a:tint val="40000"/>
-              <a:alpha val="90000"/>
-              <a:hueOff val="12771136"/>
-              <a:satOff val="-53098"/>
-              <a:lumOff val="-4485"/>
-              <a:alphaOff val="0"/>
-            </a:schemeClr>
-          </a:solidFill>
-          <a:prstDash val="solid"/>
-        </a:ln>
-        <a:effectLst/>
-        <a:sp3d z="-227350" prstMaterial="matte"/>
-      </dsp:spPr>
-      <dsp:style>
-        <a:lnRef idx="1">
-          <a:scrgbClr r="0" g="0" b="0"/>
-        </a:lnRef>
-        <a:fillRef idx="1">
-          <a:scrgbClr r="0" g="0" b="0"/>
-        </a:fillRef>
-        <a:effectRef idx="0">
-          <a:scrgbClr r="0" g="0" b="0"/>
-        </a:effectRef>
-        <a:fontRef idx="minor"/>
-      </dsp:style>
-      <dsp:txBody>
-        <a:bodyPr spcFirstLastPara="0" vert="horz" wrap="square" lIns="16510" tIns="16510" rIns="16510" bIns="16510" numCol="1" spcCol="1270" anchor="t" anchorCtr="0">
-          <a:noAutofit/>
-        </a:bodyPr>
-        <a:lstStyle/>
-        <a:p>
-          <a:pPr marL="228600" lvl="1" indent="-228600" algn="l" defTabSz="1155700">
-            <a:lnSpc>
-              <a:spcPct val="90000"/>
-            </a:lnSpc>
-            <a:spcBef>
-              <a:spcPct val="0"/>
-            </a:spcBef>
-            <a:spcAft>
-              <a:spcPct val="15000"/>
-            </a:spcAft>
-            <a:buChar char="••"/>
-          </a:pPr>
-          <a:r>
-            <a:rPr lang="de-DE" sz="2600" kern="1200" dirty="0" smtClean="0"/>
-            <a:t>Nur Entwicklungsteam</a:t>
-          </a:r>
-          <a:endParaRPr lang="de-DE" sz="2600" kern="1200" dirty="0"/>
-        </a:p>
-      </dsp:txBody>
-      <dsp:txXfrm>
-        <a:off x="2909123" y="5631138"/>
-        <a:ext cx="4363684" cy="1279267"/>
-      </dsp:txXfrm>
-    </dsp:sp>
-    <dsp:sp modelId="{68E354AB-4658-4654-8E55-C13F150074B8}">
-      <dsp:nvSpPr>
-        <dsp:cNvPr id="0" name=""/>
-        <dsp:cNvSpPr/>
-      </dsp:nvSpPr>
-      <dsp:spPr>
-        <a:xfrm>
-          <a:off x="0" y="5631138"/>
-          <a:ext cx="2909123" cy="1279267"/>
-        </a:xfrm>
-        <a:prstGeom prst="roundRect">
-          <a:avLst/>
-        </a:prstGeom>
-        <a:solidFill>
-          <a:schemeClr val="accent3">
-            <a:hueOff val="11624607"/>
-            <a:satOff val="-37145"/>
-            <a:lumOff val="-9412"/>
-            <a:alphaOff val="0"/>
-          </a:schemeClr>
-        </a:solidFill>
-        <a:ln>
-          <a:noFill/>
-        </a:ln>
-        <a:effectLst>
-          <a:outerShdw blurRad="40000" dist="23000" dir="5400000" rotWithShape="0">
-            <a:srgbClr val="000000">
-              <a:alpha val="35000"/>
-            </a:srgbClr>
-          </a:outerShdw>
-        </a:effectLst>
-        <a:sp3d extrusionH="152250" prstMaterial="matte">
-          <a:bevelT w="165100" prst="coolSlant"/>
-        </a:sp3d>
-      </dsp:spPr>
-      <dsp:style>
-        <a:lnRef idx="0">
-          <a:scrgbClr r="0" g="0" b="0"/>
-        </a:lnRef>
-        <a:fillRef idx="1">
-          <a:scrgbClr r="0" g="0" b="0"/>
-        </a:fillRef>
-        <a:effectRef idx="2">
-          <a:scrgbClr r="0" g="0" b="0"/>
-        </a:effectRef>
-        <a:fontRef idx="minor">
-          <a:schemeClr val="lt1"/>
-        </a:fontRef>
-      </dsp:style>
-      <dsp:txBody>
-        <a:bodyPr spcFirstLastPara="0" vert="horz" wrap="square" lIns="95250" tIns="47625" rIns="95250" bIns="47625" numCol="1" spcCol="1270" anchor="ctr" anchorCtr="0">
-          <a:noAutofit/>
-          <a:sp3d extrusionH="28000" prstMaterial="matte"/>
-        </a:bodyPr>
-        <a:lstStyle/>
-        <a:p>
-          <a:pPr lvl="0" algn="ctr" defTabSz="1111250">
-            <a:lnSpc>
-              <a:spcPct val="90000"/>
-            </a:lnSpc>
-            <a:spcBef>
-              <a:spcPct val="0"/>
-            </a:spcBef>
-            <a:spcAft>
-              <a:spcPct val="35000"/>
-            </a:spcAft>
-          </a:pPr>
-          <a:r>
-            <a:rPr lang="de-DE" sz="2500" kern="1200" dirty="0" smtClean="0"/>
-            <a:t>Sprint </a:t>
-          </a:r>
-          <a:r>
-            <a:rPr lang="de-DE" sz="2500" kern="1200" dirty="0" err="1" smtClean="0"/>
-            <a:t>Planning</a:t>
-          </a:r>
-          <a:r>
-            <a:rPr lang="de-DE" sz="2500" kern="1200" dirty="0" smtClean="0"/>
-            <a:t> Meeting 2</a:t>
-          </a:r>
-          <a:endParaRPr lang="de-DE" sz="2500" kern="1200" dirty="0"/>
-        </a:p>
-      </dsp:txBody>
-      <dsp:txXfrm>
-        <a:off x="0" y="5631138"/>
-        <a:ext cx="2909123" cy="1279267"/>
-      </dsp:txXfrm>
-    </dsp:sp>
   </dsp:spTree>
 </dsp:drawing>
 </file>
@@ -18286,7 +17661,7 @@
           <a:p>
             <a:r>
               <a:rPr lang="de-DE" dirty="0" smtClean="0"/>
-              <a:t>beim autonomen Segelboot</a:t>
+              <a:t>Projekt „Autonomes Segelboot“</a:t>
             </a:r>
             <a:endParaRPr lang="de-DE" dirty="0"/>
           </a:p>
@@ -18379,11 +17754,7 @@
             <a:pPr algn="ctr"/>
             <a:r>
               <a:rPr lang="de-DE" sz="2000" b="0" dirty="0" smtClean="0"/>
-              <a:t>W</a:t>
-            </a:r>
-            <a:r>
-              <a:rPr lang="de-DE" sz="2000" b="0" dirty="0" smtClean="0"/>
-              <a:t>unsch des </a:t>
+              <a:t>Wunsch des </a:t>
             </a:r>
             <a:r>
               <a:rPr lang="de-DE" sz="2000" b="0" dirty="0" err="1" smtClean="0"/>
@@ -19213,13 +18584,7 @@
               <a:rPr lang="de-DE" dirty="0" smtClean="0">
                 <a:latin typeface="+mn-lt"/>
               </a:rPr>
-              <a:t>U</a:t>
-            </a:r>
-            <a:r>
-              <a:rPr lang="de-DE" dirty="0" smtClean="0">
-                <a:latin typeface="+mn-lt"/>
-              </a:rPr>
-              <a:t>nd Los</a:t>
+              <a:t>Und Los</a:t>
             </a:r>
             <a:endParaRPr lang="de-DE" dirty="0">
               <a:latin typeface="+mn-lt"/>
@@ -19372,13 +18737,8 @@
             </a:r>
             <a:r>
               <a:rPr lang="de-DE" b="0" dirty="0" smtClean="0"/>
-              <a:t> Meeting </a:t>
+              <a:t> Meeting 1</a:t>
             </a:r>
-            <a:r>
-              <a:rPr lang="de-DE" b="0" dirty="0" smtClean="0"/>
-              <a:t>1</a:t>
-            </a:r>
-            <a:endParaRPr lang="de-DE" b="0" dirty="0" smtClean="0"/>
           </a:p>
           <a:p>
             <a:endParaRPr lang="de-DE" dirty="0"/>
@@ -19475,11 +18835,7 @@
             </a:r>
             <a:r>
               <a:rPr lang="de-DE" dirty="0" smtClean="0"/>
-              <a:t> </a:t>
-            </a:r>
-            <a:r>
-              <a:rPr lang="de-DE" dirty="0" smtClean="0"/>
-              <a:t>dem „Sprint </a:t>
+              <a:t> dem „Sprint </a:t>
             </a:r>
             <a:r>
               <a:rPr lang="de-DE" dirty="0" err="1" smtClean="0"/>
@@ -19799,11 +19155,7 @@
             <a:pPr algn="ctr"/>
             <a:r>
               <a:rPr lang="de-DE" sz="2000" b="0" dirty="0" smtClean="0"/>
-              <a:t>W</a:t>
-            </a:r>
-            <a:r>
-              <a:rPr lang="de-DE" sz="2000" b="0" dirty="0" smtClean="0"/>
-              <a:t>unsch des </a:t>
+              <a:t>Wunsch des </a:t>
             </a:r>
             <a:r>
               <a:rPr lang="de-DE" sz="2000" b="0" dirty="0" err="1" smtClean="0"/>
@@ -20451,11 +19803,7 @@
             <a:pPr algn="ctr"/>
             <a:r>
               <a:rPr lang="de-DE" sz="2000" b="0" dirty="0" smtClean="0"/>
-              <a:t>W</a:t>
-            </a:r>
-            <a:r>
-              <a:rPr lang="de-DE" sz="2000" b="0" dirty="0" smtClean="0"/>
-              <a:t>unsch des </a:t>
+              <a:t>Wunsch des </a:t>
             </a:r>
             <a:r>
               <a:rPr lang="de-DE" sz="2000" b="0" dirty="0" err="1" smtClean="0"/>
@@ -21292,13 +20640,7 @@
               <a:rPr lang="de-DE" dirty="0" smtClean="0">
                 <a:latin typeface="+mn-lt"/>
               </a:rPr>
-              <a:t>U</a:t>
-            </a:r>
-            <a:r>
-              <a:rPr lang="de-DE" dirty="0" smtClean="0">
-                <a:latin typeface="+mn-lt"/>
-              </a:rPr>
-              <a:t>nd Los</a:t>
+              <a:t>Und Los</a:t>
             </a:r>
             <a:endParaRPr lang="de-DE" dirty="0">
               <a:latin typeface="+mn-lt"/>
@@ -21451,13 +20793,8 @@
             </a:r>
             <a:r>
               <a:rPr lang="de-DE" b="0" dirty="0" smtClean="0"/>
-              <a:t> Meeting </a:t>
+              <a:t> Meeting 1</a:t>
             </a:r>
-            <a:r>
-              <a:rPr lang="de-DE" b="0" dirty="0" smtClean="0"/>
-              <a:t>1</a:t>
-            </a:r>
-            <a:endParaRPr lang="de-DE" b="0" dirty="0" smtClean="0"/>
           </a:p>
           <a:p>
             <a:endParaRPr lang="de-DE" dirty="0"/>
@@ -21650,27 +20987,7 @@
                   </a:schemeClr>
                 </a:solidFill>
               </a:rPr>
-              <a:t> Master treffen sich 15 min, um über </a:t>
-            </a:r>
-            <a:r>
-              <a:rPr lang="de-DE" dirty="0" smtClean="0">
-                <a:solidFill>
-                  <a:schemeClr val="accent3">
-                    <a:lumMod val="50000"/>
-                  </a:schemeClr>
-                </a:solidFill>
-              </a:rPr>
-              <a:t>Fortschritte und Probleme im Projekt zu </a:t>
-            </a:r>
-            <a:r>
-              <a:rPr lang="de-DE" dirty="0" smtClean="0">
-                <a:solidFill>
-                  <a:schemeClr val="accent3">
-                    <a:lumMod val="50000"/>
-                  </a:schemeClr>
-                </a:solidFill>
-              </a:rPr>
-              <a:t>berichten.</a:t>
+              <a:t> Master treffen sich 15 min, um über Fortschritte und Probleme im Projekt zu berichten.</a:t>
             </a:r>
           </a:p>
           <a:p>
@@ -21687,13 +21004,6 @@
               </a:rPr>
               <a:t>Bei uns nicht sinnvoll, aber</a:t>
             </a:r>
-            <a:endParaRPr lang="de-DE" dirty="0" smtClean="0">
-              <a:solidFill>
-                <a:schemeClr val="accent3">
-                  <a:lumMod val="50000"/>
-                </a:schemeClr>
-              </a:solidFill>
-            </a:endParaRPr>
           </a:p>
           <a:p>
             <a:pPr>
@@ -21759,17 +21069,7 @@
                   </a:schemeClr>
                 </a:solidFill>
               </a:rPr>
-              <a:t>“ ist zur Projektzeit immer </a:t>
-            </a:r>
-            <a:r>
-              <a:rPr lang="de-DE" sz="3200" b="1" dirty="0" smtClean="0">
-                <a:solidFill>
-                  <a:schemeClr val="accent3">
-                    <a:lumMod val="50000"/>
-                  </a:schemeClr>
-                </a:solidFill>
-              </a:rPr>
-              <a:t>möglich</a:t>
+              <a:t>“ ist zur Projektzeit immer möglich</a:t>
             </a:r>
           </a:p>
           <a:p>
@@ -21806,13 +21106,6 @@
               </a:rPr>
               <a:t>-Mailingliste</a:t>
             </a:r>
-            <a:endParaRPr lang="de-DE" sz="3200" b="1" dirty="0" smtClean="0">
-              <a:solidFill>
-                <a:schemeClr val="accent3">
-                  <a:lumMod val="50000"/>
-                </a:schemeClr>
-              </a:solidFill>
-            </a:endParaRPr>
           </a:p>
           <a:p>
             <a:pPr>
@@ -22311,13 +21604,7 @@
               <a:rPr lang="de-DE" dirty="0" smtClean="0">
                 <a:latin typeface="+mn-lt"/>
               </a:rPr>
-              <a:t>U</a:t>
-            </a:r>
-            <a:r>
-              <a:rPr lang="de-DE" dirty="0" smtClean="0">
-                <a:latin typeface="+mn-lt"/>
-              </a:rPr>
-              <a:t>nd Los</a:t>
+              <a:t>Und Los</a:t>
             </a:r>
             <a:endParaRPr lang="de-DE" dirty="0">
               <a:latin typeface="+mn-lt"/>
@@ -22870,11 +22157,7 @@
             </a:r>
             <a:r>
               <a:rPr lang="de-DE" dirty="0" smtClean="0"/>
-              <a:t> Einführung </a:t>
-            </a:r>
-            <a:r>
-              <a:rPr lang="de-DE" dirty="0" smtClean="0"/>
-              <a:t>– annot.pdf:</a:t>
+              <a:t> Einführung – annot.pdf:</a:t>
             </a:r>
           </a:p>
         </p:txBody>
@@ -23934,15 +23217,7 @@
             </a:r>
             <a:r>
               <a:rPr lang="de-DE" dirty="0" smtClean="0"/>
-              <a:t> in </a:t>
-            </a:r>
-            <a:r>
-              <a:rPr lang="de-DE" dirty="0" smtClean="0"/>
-              <a:t>dieser Excel-Tabelle </a:t>
-            </a:r>
-            <a:r>
-              <a:rPr lang="de-DE" dirty="0" smtClean="0"/>
-              <a:t>ab:</a:t>
+              <a:t> in dieser Excel-Tabelle ab:</a:t>
             </a:r>
             <a:br>
               <a:rPr lang="de-DE" dirty="0" smtClean="0"/>
@@ -23987,15 +23262,7 @@
             </a:r>
             <a:r>
               <a:rPr lang="de-DE" dirty="0" smtClean="0"/>
-              <a:t>/Sprint </a:t>
-            </a:r>
-            <a:r>
-              <a:rPr lang="de-DE" dirty="0" smtClean="0"/>
-              <a:t>und </a:t>
-            </a:r>
-            <a:r>
-              <a:rPr lang="de-DE" dirty="0" smtClean="0"/>
-              <a:t>Backlog.xls</a:t>
+              <a:t>/Sprint und Backlog.xls</a:t>
             </a:r>
           </a:p>
           <a:p>
@@ -24122,11 +23389,7 @@
             <a:pPr algn="ctr"/>
             <a:r>
               <a:rPr lang="de-DE" sz="2000" b="0" dirty="0" smtClean="0"/>
-              <a:t>W</a:t>
-            </a:r>
-            <a:r>
-              <a:rPr lang="de-DE" sz="2000" b="0" dirty="0" smtClean="0"/>
-              <a:t>unsch des </a:t>
+              <a:t>Wunsch des </a:t>
             </a:r>
             <a:r>
               <a:rPr lang="de-DE" sz="2000" b="0" dirty="0" err="1" smtClean="0"/>
@@ -24704,13 +23967,8 @@
             </a:r>
             <a:r>
               <a:rPr lang="de-DE" b="0" dirty="0" smtClean="0"/>
-              <a:t> Meeting </a:t>
+              <a:t> Meeting 1</a:t>
             </a:r>
-            <a:r>
-              <a:rPr lang="de-DE" b="0" dirty="0" smtClean="0"/>
-              <a:t>1</a:t>
-            </a:r>
-            <a:endParaRPr lang="de-DE" b="0" dirty="0" smtClean="0"/>
           </a:p>
           <a:p>
             <a:endParaRPr lang="de-DE" dirty="0"/>
@@ -24824,11 +24082,7 @@
             </a:r>
             <a:r>
               <a:rPr lang="de-DE" dirty="0" smtClean="0"/>
-              <a:t> dem „</a:t>
-            </a:r>
-            <a:r>
-              <a:rPr lang="de-DE" dirty="0" smtClean="0"/>
-              <a:t>Sprint </a:t>
+              <a:t> dem „Sprint </a:t>
             </a:r>
             <a:r>
               <a:rPr lang="de-DE" dirty="0" err="1" smtClean="0"/>
@@ -24836,11 +24090,7 @@
             </a:r>
             <a:r>
               <a:rPr lang="de-DE" dirty="0" smtClean="0"/>
-              <a:t> Meeting </a:t>
-            </a:r>
-            <a:r>
-              <a:rPr lang="de-DE" dirty="0" smtClean="0"/>
-              <a:t>1“</a:t>
+              <a:t> Meeting 1“</a:t>
             </a:r>
             <a:endParaRPr lang="de-DE" dirty="0"/>
           </a:p>
